--- a/studies/platform-12buoy/flume-wall-effect/Flume_wall_effect_explained.pptx
+++ b/studies/platform-12buoy/flume-wall-effect/Flume_wall_effect_explained.pptx
@@ -15,6 +15,7 @@
     <p:sldId id="263" r:id="rId14"/>
     <p:sldId id="264" r:id="rId15"/>
     <p:sldId id="265" r:id="rId16"/>
+    <p:sldId id="266" r:id="rId17"/>
   </p:sldIdLst>
   <p:sldSz cx="12191695" cy="6858000" type="screen4x3"/>
   <p:notesSz cx="6858000" cy="9144000"/>
@@ -3344,6 +3345,305 @@
                 </a:solidFill>
                 <a:latin typeface="Segoe UI"/>
               </a:rPr>
+              <a:t>THE CAVEAT</a:t>
+            </a:r>
+          </a:p>
+        </p:txBody>
+      </p:sp>
+      <p:sp>
+        <p:nvSpPr>
+          <p:cNvPr id="3" name="TextBox 2"/>
+          <p:cNvSpPr txBox="1"/>
+          <p:nvPr/>
+        </p:nvSpPr>
+        <p:spPr>
+          <a:xfrm>
+            <a:off x="640080" y="658368"/>
+            <a:ext cx="10972800" cy="822960"/>
+          </a:xfrm>
+          <a:prstGeom prst="rect">
+            <a:avLst/>
+          </a:prstGeom>
+          <a:noFill/>
+        </p:spPr>
+        <p:txBody>
+          <a:bodyPr wrap="none">
+            <a:spAutoFit/>
+          </a:bodyPr>
+          <a:lstStyle/>
+          <a:p>
+            <a:r>
+              <a:rPr sz="3000" b="1">
+                <a:solidFill>
+                  <a:srgbClr val="25323A"/>
+                </a:solidFill>
+                <a:latin typeface="Segoe UI"/>
+              </a:rPr>
+              <a:t>The one thing to watch</a:t>
+            </a:r>
+          </a:p>
+        </p:txBody>
+      </p:sp>
+      <p:sp>
+        <p:nvSpPr>
+          <p:cNvPr id="4" name="Rectangle 3"/>
+          <p:cNvSpPr/>
+          <p:nvPr/>
+        </p:nvSpPr>
+        <p:spPr>
+          <a:xfrm>
+            <a:off x="658368" y="1444752"/>
+            <a:ext cx="2011680" cy="54864"/>
+          </a:xfrm>
+          <a:prstGeom prst="rect">
+            <a:avLst/>
+          </a:prstGeom>
+          <a:solidFill>
+            <a:srgbClr val="0C8B96"/>
+          </a:solidFill>
+          <a:ln>
+            <a:noFill/>
+          </a:ln>
+          <a:effectLst/>
+        </p:spPr>
+        <p:style>
+          <a:lnRef idx="1">
+            <a:schemeClr val="accent1"/>
+          </a:lnRef>
+          <a:fillRef idx="3">
+            <a:schemeClr val="accent1"/>
+          </a:fillRef>
+          <a:effectRef idx="2">
+            <a:schemeClr val="accent1"/>
+          </a:effectRef>
+          <a:fontRef idx="minor">
+            <a:schemeClr val="lt1"/>
+          </a:fontRef>
+        </p:style>
+        <p:txBody>
+          <a:bodyPr rtlCol="0" anchor="ctr"/>
+          <a:lstStyle/>
+          <a:p>
+            <a:pPr algn="ctr"/>
+          </a:p>
+        </p:txBody>
+      </p:sp>
+      <p:sp>
+        <p:nvSpPr>
+          <p:cNvPr id="5" name="TextBox 4"/>
+          <p:cNvSpPr txBox="1"/>
+          <p:nvPr/>
+        </p:nvSpPr>
+        <p:spPr>
+          <a:xfrm>
+            <a:off x="777240" y="2103120"/>
+            <a:ext cx="10698480" cy="4572000"/>
+          </a:xfrm>
+          <a:prstGeom prst="rect">
+            <a:avLst/>
+          </a:prstGeom>
+          <a:noFill/>
+        </p:spPr>
+        <p:txBody>
+          <a:bodyPr wrap="square">
+            <a:spAutoFit/>
+          </a:bodyPr>
+          <a:lstStyle/>
+          <a:p>
+            <a:pPr>
+              <a:spcBef>
+                <a:spcPts val="200"/>
+              </a:spcBef>
+              <a:spcAft>
+                <a:spcPts val="1600"/>
+              </a:spcAft>
+            </a:pPr>
+            <a:r>
+              <a:rPr sz="1900">
+                <a:solidFill>
+                  <a:srgbClr val="0C8B96"/>
+                </a:solidFill>
+                <a:latin typeface="Segoe UI"/>
+              </a:rPr>
+              <a:t>•  </a:t>
+            </a:r>
+            <a:r>
+              <a:rPr sz="1900" b="0" i="0">
+                <a:solidFill>
+                  <a:srgbClr val="25323A"/>
+                </a:solidFill>
+                <a:latin typeface="Segoe UI"/>
+              </a:rPr>
+              <a:t>A flume can “ring” sideways like a bathtub at a few special wave periods </a:t>
+            </a:r>
+            <a:r>
+              <a:rPr sz="1900" b="1" i="0">
+                <a:solidFill>
+                  <a:srgbClr val="D1543A"/>
+                </a:solidFill>
+                <a:latin typeface="Segoe UI"/>
+              </a:rPr>
+              <a:t>(≈ 2.2, 1.5, 1.25 s)</a:t>
+            </a:r>
+            <a:r>
+              <a:rPr sz="1900" b="0" i="0">
+                <a:solidFill>
+                  <a:srgbClr val="25323A"/>
+                </a:solidFill>
+                <a:latin typeface="Segoe UI"/>
+              </a:rPr>
+              <a:t>.</a:t>
+            </a:r>
+          </a:p>
+          <a:p>
+            <a:pPr>
+              <a:spcBef>
+                <a:spcPts val="200"/>
+              </a:spcBef>
+              <a:spcAft>
+                <a:spcPts val="1600"/>
+              </a:spcAft>
+            </a:pPr>
+            <a:r>
+              <a:rPr sz="1900">
+                <a:solidFill>
+                  <a:srgbClr val="0C8B96"/>
+                </a:solidFill>
+                <a:latin typeface="Segoe UI"/>
+              </a:rPr>
+              <a:t>•  </a:t>
+            </a:r>
+            <a:r>
+              <a:rPr sz="1900" b="0" i="0">
+                <a:solidFill>
+                  <a:srgbClr val="25323A"/>
+                </a:solidFill>
+                <a:latin typeface="Segoe UI"/>
+              </a:rPr>
+              <a:t>Near those, the walls </a:t>
+            </a:r>
+            <a:r>
+              <a:rPr sz="1900" b="0" i="1">
+                <a:solidFill>
+                  <a:srgbClr val="25323A"/>
+                </a:solidFill>
+                <a:latin typeface="Segoe UI"/>
+              </a:rPr>
+              <a:t>do</a:t>
+            </a:r>
+            <a:r>
+              <a:rPr sz="1900" b="0" i="0">
+                <a:solidFill>
+                  <a:srgbClr val="25323A"/>
+                </a:solidFill>
+                <a:latin typeface="Segoe UI"/>
+              </a:rPr>
+              <a:t> matter — so we simply </a:t>
+            </a:r>
+            <a:r>
+              <a:rPr sz="1900" b="1" i="0">
+                <a:solidFill>
+                  <a:srgbClr val="0A5560"/>
+                </a:solidFill>
+                <a:latin typeface="Segoe UI"/>
+              </a:rPr>
+              <a:t>avoid parking a test exactly there</a:t>
+            </a:r>
+            <a:r>
+              <a:rPr sz="1900" b="0" i="0">
+                <a:solidFill>
+                  <a:srgbClr val="25323A"/>
+                </a:solidFill>
+                <a:latin typeface="Segoe UI"/>
+              </a:rPr>
+              <a:t>.</a:t>
+            </a:r>
+          </a:p>
+          <a:p>
+            <a:pPr>
+              <a:spcBef>
+                <a:spcPts val="200"/>
+              </a:spcBef>
+              <a:spcAft>
+                <a:spcPts val="1600"/>
+              </a:spcAft>
+            </a:pPr>
+            <a:r>
+              <a:rPr sz="1900">
+                <a:solidFill>
+                  <a:srgbClr val="0C8B96"/>
+                </a:solidFill>
+                <a:latin typeface="Segoe UI"/>
+              </a:rPr>
+              <a:t>•  </a:t>
+            </a:r>
+            <a:r>
+              <a:rPr sz="1900" b="0" i="0">
+                <a:solidFill>
+                  <a:srgbClr val="25323A"/>
+                </a:solidFill>
+                <a:latin typeface="Segoe UI"/>
+              </a:rPr>
+              <a:t>They're narrow, known in advance, and easy to step around in the test plan.</a:t>
+            </a:r>
+          </a:p>
+        </p:txBody>
+      </p:sp>
+    </p:spTree>
+  </p:cSld>
+  <p:clrMapOvr>
+    <a:masterClrMapping/>
+  </p:clrMapOvr>
+</p:sld>
+</file>
+
+<file path=ppt/slides/slide11.xml><?xml version="1.0" encoding="utf-8"?>
+<p:sld xmlns:a="http://schemas.openxmlformats.org/drawingml/2006/main" xmlns:p="http://schemas.openxmlformats.org/presentationml/2006/main" xmlns:r="http://schemas.openxmlformats.org/officeDocument/2006/relationships">
+  <p:cSld>
+    <p:bg>
+      <p:bgPr>
+        <a:solidFill>
+          <a:srgbClr val="FFFFFF"/>
+        </a:solidFill>
+        <a:effectLst/>
+      </p:bgPr>
+    </p:bg>
+    <p:spTree>
+      <p:nvGrpSpPr>
+        <p:cNvPr id="1" name=""/>
+        <p:cNvGrpSpPr/>
+        <p:nvPr/>
+      </p:nvGrpSpPr>
+      <p:grpSpPr/>
+      <p:sp>
+        <p:nvSpPr>
+          <p:cNvPr id="2" name="TextBox 1"/>
+          <p:cNvSpPr txBox="1"/>
+          <p:nvPr/>
+        </p:nvSpPr>
+        <p:spPr>
+          <a:xfrm>
+            <a:off x="640080" y="384048"/>
+            <a:ext cx="10972800" cy="365760"/>
+          </a:xfrm>
+          <a:prstGeom prst="rect">
+            <a:avLst/>
+          </a:prstGeom>
+          <a:noFill/>
+        </p:spPr>
+        <p:txBody>
+          <a:bodyPr wrap="none">
+            <a:spAutoFit/>
+          </a:bodyPr>
+          <a:lstStyle/>
+          <a:p>
+            <a:r>
+              <a:rPr sz="1300" b="1">
+                <a:solidFill>
+                  <a:srgbClr val="0C8B96"/>
+                </a:solidFill>
+                <a:latin typeface="Segoe UI"/>
+              </a:rPr>
               <a:t>CONCLUSION</a:t>
             </a:r>
           </a:p>
@@ -6097,7 +6397,7 @@
                 </a:solidFill>
                 <a:latin typeface="Segoe UI"/>
               </a:rPr>
-              <a:t>THE CAVEAT</a:t>
+              <a:t>RESULTS</a:t>
             </a:r>
           </a:p>
         </p:txBody>
@@ -6131,7 +6431,7 @@
                 </a:solidFill>
                 <a:latin typeface="Segoe UI"/>
               </a:rPr>
-              <a:t>The one thing to watch</a:t>
+              <a:t>Result 4 — every direction, not just up-down</a:t>
             </a:r>
           </a:p>
         </p:txBody>
@@ -6180,16 +6480,84 @@
           </a:p>
         </p:txBody>
       </p:sp>
-      <p:sp>
-        <p:nvSpPr>
-          <p:cNvPr id="5" name="TextBox 4"/>
+      <p:pic>
+        <p:nvPicPr>
+          <p:cNvPr id="5" name="Picture 4" descr="accel_multidof.png"/>
+          <p:cNvPicPr>
+            <a:picLocks noChangeAspect="1"/>
+          </p:cNvPicPr>
+          <p:nvPr/>
+        </p:nvPicPr>
+        <p:blipFill>
+          <a:blip r:embed="rId2"/>
+          <a:stretch>
+            <a:fillRect/>
+          </a:stretch>
+        </p:blipFill>
+        <p:spPr>
+          <a:xfrm>
+            <a:off x="1051560" y="1874519"/>
+            <a:ext cx="10058400" cy="3013064"/>
+          </a:xfrm>
+          <a:prstGeom prst="rect">
+            <a:avLst/>
+          </a:prstGeom>
+        </p:spPr>
+      </p:pic>
+      <p:sp>
+        <p:nvSpPr>
+          <p:cNvPr id="6" name="Rectangle 5"/>
+          <p:cNvSpPr/>
+          <p:nvPr/>
+        </p:nvSpPr>
+        <p:spPr>
+          <a:xfrm>
+            <a:off x="777240" y="5532120"/>
+            <a:ext cx="10607040" cy="1051560"/>
+          </a:xfrm>
+          <a:prstGeom prst="rect">
+            <a:avLst/>
+          </a:prstGeom>
+          <a:solidFill>
+            <a:srgbClr val="EEF6F7"/>
+          </a:solidFill>
+          <a:ln>
+            <a:noFill/>
+          </a:ln>
+          <a:effectLst/>
+        </p:spPr>
+        <p:style>
+          <a:lnRef idx="1">
+            <a:schemeClr val="accent1"/>
+          </a:lnRef>
+          <a:fillRef idx="3">
+            <a:schemeClr val="accent1"/>
+          </a:fillRef>
+          <a:effectRef idx="2">
+            <a:schemeClr val="accent1"/>
+          </a:effectRef>
+          <a:fontRef idx="minor">
+            <a:schemeClr val="lt1"/>
+          </a:fontRef>
+        </p:style>
+        <p:txBody>
+          <a:bodyPr rtlCol="0" anchor="ctr"/>
+          <a:lstStyle/>
+          <a:p>
+            <a:pPr algn="ctr"/>
+          </a:p>
+        </p:txBody>
+      </p:sp>
+      <p:sp>
+        <p:nvSpPr>
+          <p:cNvPr id="7" name="TextBox 6"/>
           <p:cNvSpPr txBox="1"/>
           <p:nvPr/>
         </p:nvSpPr>
         <p:spPr>
           <a:xfrm>
-            <a:off x="777240" y="2103120"/>
-            <a:ext cx="10698480" cy="4572000"/>
+            <a:off x="960120" y="5568696"/>
+            <a:ext cx="10241280" cy="978407"/>
           </a:xfrm>
           <a:prstGeom prst="rect">
             <a:avLst/>
@@ -6197,146 +6565,56 @@
           <a:noFill/>
         </p:spPr>
         <p:txBody>
-          <a:bodyPr wrap="square">
+          <a:bodyPr wrap="square" anchor="ctr">
             <a:spAutoFit/>
           </a:bodyPr>
           <a:lstStyle/>
           <a:p>
-            <a:pPr>
-              <a:spcBef>
-                <a:spcPts val="200"/>
-              </a:spcBef>
-              <a:spcAft>
-                <a:spcPts val="1600"/>
-              </a:spcAft>
-            </a:pPr>
-            <a:r>
-              <a:rPr sz="1900">
-                <a:solidFill>
-                  <a:srgbClr val="0C8B96"/>
-                </a:solidFill>
-                <a:latin typeface="Segoe UI"/>
-              </a:rPr>
-              <a:t>•  </a:t>
-            </a:r>
-            <a:r>
-              <a:rPr sz="1900" b="0" i="0">
-                <a:solidFill>
-                  <a:srgbClr val="25323A"/>
-                </a:solidFill>
-                <a:latin typeface="Segoe UI"/>
-              </a:rPr>
-              <a:t>A flume can “ring” sideways like a bathtub at a few special wave periods </a:t>
-            </a:r>
-            <a:r>
-              <a:rPr sz="1900" b="1" i="0">
-                <a:solidFill>
-                  <a:srgbClr val="D1543A"/>
-                </a:solidFill>
-                <a:latin typeface="Segoe UI"/>
-              </a:rPr>
-              <a:t>(≈ 2.2, 1.5, 1.25 s)</a:t>
-            </a:r>
-            <a:r>
-              <a:rPr sz="1900" b="0" i="0">
-                <a:solidFill>
-                  <a:srgbClr val="25323A"/>
-                </a:solidFill>
-                <a:latin typeface="Segoe UI"/>
-              </a:rPr>
-              <a:t>.</a:t>
-            </a:r>
-          </a:p>
-          <a:p>
-            <a:pPr>
-              <a:spcBef>
-                <a:spcPts val="200"/>
-              </a:spcBef>
-              <a:spcAft>
-                <a:spcPts val="1600"/>
-              </a:spcAft>
-            </a:pPr>
-            <a:r>
-              <a:rPr sz="1900">
-                <a:solidFill>
-                  <a:srgbClr val="0C8B96"/>
-                </a:solidFill>
-                <a:latin typeface="Segoe UI"/>
-              </a:rPr>
-              <a:t>•  </a:t>
-            </a:r>
-            <a:r>
-              <a:rPr sz="1900" b="0" i="0">
-                <a:solidFill>
-                  <a:srgbClr val="25323A"/>
-                </a:solidFill>
-                <a:latin typeface="Segoe UI"/>
-              </a:rPr>
-              <a:t>Near those, the walls </a:t>
-            </a:r>
-            <a:r>
-              <a:rPr sz="1900" b="0" i="1">
-                <a:solidFill>
-                  <a:srgbClr val="25323A"/>
-                </a:solidFill>
-                <a:latin typeface="Segoe UI"/>
-              </a:rPr>
-              <a:t>do</a:t>
-            </a:r>
-            <a:r>
-              <a:rPr sz="1900" b="0" i="0">
-                <a:solidFill>
-                  <a:srgbClr val="25323A"/>
-                </a:solidFill>
-                <a:latin typeface="Segoe UI"/>
-              </a:rPr>
-              <a:t> matter — so we simply </a:t>
-            </a:r>
-            <a:r>
-              <a:rPr sz="1900" b="1" i="0">
+            <a:pPr algn="ctr"/>
+            <a:r>
+              <a:rPr sz="1300" b="0" i="0">
+                <a:solidFill>
+                  <a:srgbClr val="25323A"/>
+                </a:solidFill>
+                <a:latin typeface="Segoe UI"/>
+              </a:rPr>
+              <a:t>We checked the accelerometers in </a:t>
+            </a:r>
+            <a:r>
+              <a:rPr sz="1300" b="1" i="0">
                 <a:solidFill>
                   <a:srgbClr val="0A5560"/>
                 </a:solidFill>
                 <a:latin typeface="Segoe UI"/>
               </a:rPr>
-              <a:t>avoid parking a test exactly there</a:t>
-            </a:r>
-            <a:r>
-              <a:rPr sz="1900" b="0" i="0">
-                <a:solidFill>
-                  <a:srgbClr val="25323A"/>
-                </a:solidFill>
-                <a:latin typeface="Segoe UI"/>
-              </a:rPr>
-              <a:t>.</a:t>
-            </a:r>
-          </a:p>
-          <a:p>
-            <a:pPr>
-              <a:spcBef>
-                <a:spcPts val="200"/>
-              </a:spcBef>
-              <a:spcAft>
-                <a:spcPts val="1600"/>
-              </a:spcAft>
-            </a:pPr>
-            <a:r>
-              <a:rPr sz="1900">
-                <a:solidFill>
-                  <a:srgbClr val="0C8B96"/>
-                </a:solidFill>
-                <a:latin typeface="Segoe UI"/>
-              </a:rPr>
-              <a:t>•  </a:t>
-            </a:r>
-            <a:r>
-              <a:rPr sz="1900" b="0" i="0">
-                <a:solidFill>
-                  <a:srgbClr val="25323A"/>
-                </a:solidFill>
-                <a:latin typeface="Segoe UI"/>
-              </a:rPr>
-              <a:t>They're narrow, known in advance, and easy to step around in the test plan.</a:t>
+              <a:t>every direction they can move</a:t>
+            </a:r>
+            <a:r>
+              <a:rPr sz="1300" b="0" i="0">
+                <a:solidFill>
+                  <a:srgbClr val="25323A"/>
+                </a:solidFill>
+                <a:latin typeface="Segoe UI"/>
+              </a:rPr>
+              <a:t> — fore-aft, up-down, and tilt (pitch). Walls in vs out changes each one by </a:t>
+            </a:r>
+            <a:r>
+              <a:rPr sz="1300" b="1" i="0">
+                <a:solidFill>
+                  <a:srgbClr val="0A5560"/>
+                </a:solidFill>
+                <a:latin typeface="Segoe UI"/>
+              </a:rPr>
+              <a:t>at most 3%</a:t>
+            </a:r>
+            <a:r>
+              <a:rPr sz="1300" b="0" i="0">
+                <a:solidFill>
+                  <a:srgbClr val="25323A"/>
+                </a:solidFill>
+                <a:latin typeface="Segoe UI"/>
+              </a:rPr>
+              <a:t>, at the deck centre and all four cluster points. Side-to-side and twist stay essentially zero (the waves come straight down the flume).</a:t>
             </a:r>
           </a:p>
         </p:txBody>

--- a/studies/platform-12buoy/flume-wall-effect/Flume_wall_effect_explained.pptx
+++ b/studies/platform-12buoy/flume-wall-effect/Flume_wall_effect_explained.pptx
@@ -3274,7 +3274,7 @@
                 </a:solidFill>
                 <a:latin typeface="Segoe UI"/>
               </a:rPr>
-              <a:t>Short answer: no. The 2.5 m, 12-buoy platform is fine in the OSU wave flume.</a:t>
+              <a:t>Short answer: no. The 2.5 m, 16-buoy platform is fine in the OSU wave flume.</a:t>
             </a:r>
           </a:p>
           <a:p>
@@ -3436,7 +3436,7 @@
         </p:nvSpPr>
         <p:spPr>
           <a:xfrm>
-            <a:off x="777240" y="2103120"/>
+            <a:off x="777240" y="2011680"/>
             <a:ext cx="10698480" cy="4572000"/>
           </a:xfrm>
           <a:prstGeom prst="rect">
@@ -3455,7 +3455,7 @@
                 <a:spcPts val="200"/>
               </a:spcBef>
               <a:spcAft>
-                <a:spcPts val="1600"/>
+                <a:spcPts val="1400"/>
               </a:spcAft>
             </a:pPr>
             <a:r>
@@ -3501,7 +3501,7 @@
                 <a:spcPts val="200"/>
               </a:spcBef>
               <a:spcAft>
-                <a:spcPts val="1600"/>
+                <a:spcPts val="1400"/>
               </a:spcAft>
             </a:pPr>
             <a:r>
@@ -3565,7 +3565,7 @@
                 <a:spcPts val="200"/>
               </a:spcBef>
               <a:spcAft>
-                <a:spcPts val="1600"/>
+                <a:spcPts val="1400"/>
               </a:spcAft>
             </a:pPr>
             <a:r>
@@ -3585,6 +3585,70 @@
                 <a:latin typeface="Segoe UI"/>
               </a:rPr>
               <a:t>They're narrow, known in advance, and easy to step around in the test plan.</a:t>
+            </a:r>
+          </a:p>
+          <a:p>
+            <a:pPr>
+              <a:spcBef>
+                <a:spcPts val="200"/>
+              </a:spcBef>
+              <a:spcAft>
+                <a:spcPts val="1400"/>
+              </a:spcAft>
+            </a:pPr>
+            <a:r>
+              <a:rPr sz="1900">
+                <a:solidFill>
+                  <a:srgbClr val="0C8B96"/>
+                </a:solidFill>
+                <a:latin typeface="Segoe UI"/>
+              </a:rPr>
+              <a:t>•  </a:t>
+            </a:r>
+            <a:r>
+              <a:rPr sz="1900" b="0" i="0">
+                <a:solidFill>
+                  <a:srgbClr val="25323A"/>
+                </a:solidFill>
+                <a:latin typeface="Segoe UI"/>
+              </a:rPr>
+              <a:t>And for </a:t>
+            </a:r>
+            <a:r>
+              <a:rPr sz="1900" b="1" i="0">
+                <a:solidFill>
+                  <a:srgbClr val="25323A"/>
+                </a:solidFill>
+                <a:latin typeface="Segoe UI"/>
+              </a:rPr>
+              <a:t>very long waves</a:t>
+            </a:r>
+            <a:r>
+              <a:rPr sz="1900" b="0" i="0">
+                <a:solidFill>
+                  <a:srgbClr val="25323A"/>
+                </a:solidFill>
+                <a:latin typeface="Segoe UI"/>
+              </a:rPr>
+              <a:t> (slower than ~3 s), the </a:t>
+            </a:r>
+            <a:r>
+              <a:rPr sz="1900" b="1" i="0">
+                <a:solidFill>
+                  <a:srgbClr val="D1543A"/>
+                </a:solidFill>
+                <a:latin typeface="Segoe UI"/>
+              </a:rPr>
+              <a:t>shallow water depth</a:t>
+            </a:r>
+            <a:r>
+              <a:rPr sz="1900" b="0" i="0">
+                <a:solidFill>
+                  <a:srgbClr val="25323A"/>
+                </a:solidFill>
+                <a:latin typeface="Segoe UI"/>
+              </a:rPr>
+              <a:t> is the bigger effect — corrected as standard, just like any flume test.</a:t>
             </a:r>
           </a:p>
         </p:txBody>
@@ -3773,7 +3837,7 @@
                 </a:solidFill>
                 <a:latin typeface="Segoe UI"/>
               </a:rPr>
-              <a:t>The 2.5 m, 12-buoy platform is </a:t>
+              <a:t>The 2.5 m, 16-buoy platform is </a:t>
             </a:r>
             <a:r>
               <a:rPr sz="1900" b="1" i="0">
@@ -3828,7 +3892,7 @@
                 </a:solidFill>
                 <a:latin typeface="Segoe UI"/>
               </a:rPr>
-              <a:t>&lt; 0.5%</a:t>
+              <a:t>about ½%</a:t>
             </a:r>
             <a:r>
               <a:rPr sz="1900" b="0" i="0">
@@ -3855,7 +3919,7 @@
                 </a:solidFill>
                 <a:latin typeface="Segoe UI"/>
               </a:rPr>
-              <a:t>, and the wave response by </a:t>
+              <a:t>, and the near-resonance wave response by </a:t>
             </a:r>
             <a:r>
               <a:rPr sz="1900" b="1" i="0">
@@ -3873,7 +3937,7 @@
                 </a:solidFill>
                 <a:latin typeface="Segoe UI"/>
               </a:rPr>
-              <a:t> — confirmed in the full multi-body model.</a:t>
+              <a:t>.</a:t>
             </a:r>
           </a:p>
           <a:p>
@@ -3895,6 +3959,52 @@
               <a:t>•  </a:t>
             </a:r>
             <a:r>
+              <a:rPr sz="1900" b="0" i="0">
+                <a:solidFill>
+                  <a:srgbClr val="25323A"/>
+                </a:solidFill>
+                <a:latin typeface="Segoe UI"/>
+              </a:rPr>
+              <a:t>The bigger flume factor is the </a:t>
+            </a:r>
+            <a:r>
+              <a:rPr sz="1900" b="1" i="0">
+                <a:solidFill>
+                  <a:srgbClr val="D1543A"/>
+                </a:solidFill>
+                <a:latin typeface="Segoe UI"/>
+              </a:rPr>
+              <a:t>shallow water depth</a:t>
+            </a:r>
+            <a:r>
+              <a:rPr sz="1900" b="0" i="0">
+                <a:solidFill>
+                  <a:srgbClr val="25323A"/>
+                </a:solidFill>
+                <a:latin typeface="Segoe UI"/>
+              </a:rPr>
+              <a:t> (not the walls) — a routine, corrected effect.</a:t>
+            </a:r>
+          </a:p>
+          <a:p>
+            <a:pPr>
+              <a:spcBef>
+                <a:spcPts val="200"/>
+              </a:spcBef>
+              <a:spcAft>
+                <a:spcPts val="1500"/>
+              </a:spcAft>
+            </a:pPr>
+            <a:r>
+              <a:rPr sz="1900">
+                <a:solidFill>
+                  <a:srgbClr val="0C8B96"/>
+                </a:solidFill>
+                <a:latin typeface="Segoe UI"/>
+              </a:rPr>
+              <a:t>•  </a:t>
+            </a:r>
+            <a:r>
               <a:rPr sz="1900" b="1" i="0">
                 <a:solidFill>
                   <a:srgbClr val="25323A"/>
@@ -3929,7 +4039,7 @@
                 </a:solidFill>
                 <a:latin typeface="Segoe UI"/>
               </a:rPr>
-              <a:t>the platform barely makes waves, so there's almost nothing for the walls to reflect — the flume test measures the real, open-water behaviour.</a:t>
+              <a:t>the platform barely makes waves, so there's almost nothing for the walls to reflect — the flume test measures the real behaviour once depth is accounted for.</a:t>
             </a:r>
           </a:p>
         </p:txBody>
@@ -4142,7 +4252,7 @@
                 </a:solidFill>
                 <a:latin typeface="Segoe UI"/>
               </a:rPr>
-              <a:t>We want to test a floating platform — 12 buoys on a 2.5 m frame — in OSU's wave flume (a long tank, </a:t>
+              <a:t>We want to test a floating platform — 16 buoys on a 2.5 m frame — in OSU's wave flume (a long tank, </a:t>
             </a:r>
             <a:r>
               <a:rPr sz="1900" b="1" i="0">
@@ -4967,7 +5077,7 @@
                 </a:solidFill>
                 <a:latin typeface="Segoe UI"/>
               </a:rPr>
-              <a:t>3.  A full simulation of the whole 17-piece platform</a:t>
+              <a:t>3.  A full simulation of the whole 21-piece platform</a:t>
             </a:r>
             <a:r>
               <a:rPr sz="1900" b="0" i="0">
@@ -5107,7 +5217,7 @@
                 </a:solidFill>
                 <a:latin typeface="Segoe UI"/>
               </a:rPr>
-              <a:t>What is the “17-piece” platform?</a:t>
+              <a:t>What is the “21-piece” platform?</a:t>
             </a:r>
           </a:p>
         </p:txBody>
@@ -5248,7 +5358,7 @@
                 </a:solidFill>
                 <a:latin typeface="Segoe UI"/>
               </a:rPr>
-              <a:t>12 buoys</a:t>
+              <a:t>16 buoys</a:t>
             </a:r>
             <a:r>
               <a:rPr sz="1600" b="0" i="0">
@@ -5294,7 +5404,7 @@
                 </a:solidFill>
                 <a:latin typeface="Segoe UI"/>
               </a:rPr>
-              <a:t> — each holds 3 buoys on gimbal pins</a:t>
+              <a:t> — each holds 4 buoys on gimbal pins</a:t>
             </a:r>
           </a:p>
           <a:p>
@@ -5359,7 +5469,7 @@
                 </a:solidFill>
                 <a:latin typeface="Segoe UI"/>
               </a:rPr>
-              <a:t>12 + 4 + 1 = </a:t>
+              <a:t>16 + 4 + 1 = </a:t>
             </a:r>
             <a:r>
               <a:rPr sz="1900" b="1" i="0">
@@ -5368,7 +5478,7 @@
                 </a:solidFill>
                 <a:latin typeface="Segoe UI"/>
               </a:rPr>
-              <a:t>17 pieces</a:t>
+              <a:t>21 pieces</a:t>
             </a:r>
             <a:r>
               <a:rPr sz="1900" b="0" i="0">
@@ -5395,7 +5505,7 @@
                 </a:solidFill>
                 <a:latin typeface="Segoe UI"/>
               </a:rPr>
-              <a:t> let each buoy tilt on its own — that's why we model all 17, not one rigid block.</a:t>
+              <a:t> let each buoy tilt on its own — that's why we model all 21, not one rigid block.</a:t>
             </a:r>
           </a:p>
         </p:txBody>
@@ -5621,7 +5731,7 @@
                 </a:solidFill>
                 <a:latin typeface="Segoe UI"/>
               </a:rPr>
-              <a:t>speed changes by less than 0.5%</a:t>
+              <a:t>speed changes by about half a percent</a:t>
             </a:r>
             <a:r>
               <a:rPr sz="1900" b="0" i="0">
@@ -5801,7 +5911,7 @@
                 </a:solidFill>
                 <a:latin typeface="Segoe UI"/>
               </a:rPr>
-              <a:t>Less than half a percent is far smaller than the </a:t>
+              <a:t>Half a percent is far smaller than the </a:t>
             </a:r>
             <a:r>
               <a:rPr sz="1400" b="1" i="0">
@@ -5913,7 +6023,7 @@
                 </a:solidFill>
                 <a:latin typeface="Segoe UI"/>
               </a:rPr>
-              <a:t>Result 2 — the response to waves (all methods agree)</a:t>
+              <a:t>Result 2 — the response to waves</a:t>
             </a:r>
           </a:p>
         </p:txBody>
@@ -5979,7 +6089,7 @@
         <p:spPr>
           <a:xfrm>
             <a:off x="960120" y="1691640"/>
-            <a:ext cx="10241280" cy="3929083"/>
+            <a:ext cx="10241280" cy="3790781"/>
           </a:xfrm>
           <a:prstGeom prst="rect">
             <a:avLst/>
@@ -6060,7 +6170,7 @@
                 </a:solidFill>
                 <a:latin typeface="Segoe UI"/>
               </a:rPr>
-              <a:t>Across the wave periods we'll test, the walls change the response by </a:t>
+              <a:t>Near the platform's natural bobbing period — where the response is biggest and matters most — the walls change it by </a:t>
             </a:r>
             <a:r>
               <a:rPr sz="1300" b="1" i="0">
@@ -6078,7 +6188,7 @@
                 </a:solidFill>
                 <a:latin typeface="Segoe UI"/>
               </a:rPr>
-              <a:t> — and the pen-and-paper, one-buoy, and full-platform methods all land in the same place. The bobbing-speed change is under 0.5% in every method.</a:t>
+              <a:t>. Two independent models (frequency-domain and the full articulated platform) agree.</a:t>
             </a:r>
           </a:p>
         </p:txBody>
@@ -6172,7 +6282,7 @@
                 </a:solidFill>
                 <a:latin typeface="Segoe UI"/>
               </a:rPr>
-              <a:t>Result 3 — the accelerometers barely move</a:t>
+              <a:t>Result 3 — the shallow water matters more than the walls</a:t>
             </a:r>
           </a:p>
         </p:txBody>
@@ -6223,7 +6333,7 @@
       </p:sp>
       <p:pic>
         <p:nvPicPr>
-          <p:cNvPr id="5" name="Picture 4" descr="articulated_accel.png"/>
+          <p:cNvPr id="5" name="Picture 4" descr="wall_vs_depth.png"/>
           <p:cNvPicPr>
             <a:picLocks noChangeAspect="1"/>
           </p:cNvPicPr>
@@ -6237,8 +6347,8 @@
         </p:blipFill>
         <p:spPr>
           <a:xfrm>
-            <a:off x="960120" y="1691640"/>
-            <a:ext cx="10241280" cy="3742770"/>
+            <a:off x="1234440" y="1783080"/>
+            <a:ext cx="9692640" cy="4567513"/>
           </a:xfrm>
           <a:prstGeom prst="rect">
             <a:avLst/>
@@ -6253,8 +6363,8 @@
         </p:nvSpPr>
         <p:spPr>
           <a:xfrm>
-            <a:off x="777240" y="5897880"/>
-            <a:ext cx="10607040" cy="731520"/>
+            <a:off x="777240" y="5852160"/>
+            <a:ext cx="10607040" cy="777240"/>
           </a:xfrm>
           <a:prstGeom prst="rect">
             <a:avLst/>
@@ -6297,8 +6407,8 @@
         </p:nvSpPr>
         <p:spPr>
           <a:xfrm>
-            <a:off x="960120" y="5934456"/>
-            <a:ext cx="10241280" cy="658368"/>
+            <a:off x="960120" y="5888736"/>
+            <a:ext cx="10241280" cy="704088"/>
           </a:xfrm>
           <a:prstGeom prst="rect">
             <a:avLst/>
@@ -6319,16 +6429,34 @@
                 </a:solidFill>
                 <a:latin typeface="Segoe UI"/>
               </a:rPr>
-              <a:t>The accelerations at the </a:t>
+              <a:t>At long waves the effect grows — but it's mostly the </a:t>
             </a:r>
             <a:r>
               <a:rPr sz="1300" b="1" i="0">
                 <a:solidFill>
+                  <a:srgbClr val="D1543A"/>
+                </a:solidFill>
+                <a:latin typeface="Segoe UI"/>
+              </a:rPr>
+              <a:t>shallow 2.7 m depth</a:t>
+            </a:r>
+            <a:r>
+              <a:rPr sz="1300" b="0" i="0">
+                <a:solidFill>
+                  <a:srgbClr val="25323A"/>
+                </a:solidFill>
+                <a:latin typeface="Segoe UI"/>
+              </a:rPr>
+              <a:t>, not the walls (teal). Depth is a </a:t>
+            </a:r>
+            <a:r>
+              <a:rPr sz="1300" b="1" i="0">
+                <a:solidFill>
                   <a:srgbClr val="0A5560"/>
                 </a:solidFill>
                 <a:latin typeface="Segoe UI"/>
               </a:rPr>
-              <a:t>deck centre and the four cluster points</a:t>
+              <a:t>known, routine correction</a:t>
             </a:r>
             <a:r>
               <a:rPr sz="1300" b="0" i="0">
@@ -6337,7 +6465,7 @@
                 </a:solidFill>
                 <a:latin typeface="Segoe UI"/>
               </a:rPr>
-              <a:t> — the real sensor locations — are essentially the same with the walls in or out.</a:t>
+              <a:t> every flume test applies; the walls add far less on top.</a:t>
             </a:r>
           </a:p>
         </p:txBody>
@@ -6596,7 +6724,7 @@
                 </a:solidFill>
                 <a:latin typeface="Segoe UI"/>
               </a:rPr>
-              <a:t> — fore-aft, up-down, and tilt (pitch). Walls in vs out changes each one by </a:t>
+              <a:t> — fore-aft, up-down, and tilt (pitch). Near the natural period, walls in vs out changes each one by </a:t>
             </a:r>
             <a:r>
               <a:rPr sz="1300" b="1" i="0">
@@ -6605,7 +6733,7 @@
                 </a:solidFill>
                 <a:latin typeface="Segoe UI"/>
               </a:rPr>
-              <a:t>at most 3%</a:t>
+              <a:t>about 4% or less</a:t>
             </a:r>
             <a:r>
               <a:rPr sz="1300" b="0" i="0">

--- a/studies/platform-12buoy/flume-wall-effect/Flume_wall_effect_explained.pptx
+++ b/studies/platform-12buoy/flume-wall-effect/Flume_wall_effect_explained.pptx
@@ -5114,16 +5114,7 @@
                 </a:solidFill>
                 <a:latin typeface="Segoe UI"/>
               </a:rPr>
-              <a:t>All three had to agree before we trusted the answer. </a:t>
-            </a:r>
-            <a:r>
-              <a:rPr sz="1900" b="1" i="0">
-                <a:solidFill>
-                  <a:srgbClr val="0A5560"/>
-                </a:solidFill>
-                <a:latin typeface="Segoe UI"/>
-              </a:rPr>
-              <a:t>They do.</a:t>
+              <a:t>The full-platform model (3) is the one we trust; the simpler checks point the same way near the platform's natural bobbing period.</a:t>
             </a:r>
           </a:p>
         </p:txBody>
@@ -6170,7 +6161,7 @@
                 </a:solidFill>
                 <a:latin typeface="Segoe UI"/>
               </a:rPr>
-              <a:t>Near the platform's natural bobbing period — where the response is biggest and matters most — the walls change it by </a:t>
+              <a:t>Across every wave period we'll test, the full articulated-platform simulation shows the walls change the response by </a:t>
             </a:r>
             <a:r>
               <a:rPr sz="1300" b="1" i="0">
@@ -6179,7 +6170,7 @@
                 </a:solidFill>
                 <a:latin typeface="Segoe UI"/>
               </a:rPr>
-              <a:t>only a few percent</a:t>
+              <a:t>at most about 4%</a:t>
             </a:r>
             <a:r>
               <a:rPr sz="1300" b="0" i="0">
@@ -6188,7 +6179,7 @@
                 </a:solidFill>
                 <a:latin typeface="Segoe UI"/>
               </a:rPr>
-              <a:t>. Two independent models (frequency-domain and the full articulated platform) agree.</a:t>
+              <a:t> — and it doesn't grow at long waves.</a:t>
             </a:r>
           </a:p>
         </p:txBody>
@@ -6429,16 +6420,34 @@
                 </a:solidFill>
                 <a:latin typeface="Segoe UI"/>
               </a:rPr>
-              <a:t>At long waves the effect grows — but it's mostly the </a:t>
+              <a:t>The walls (teal) stay </a:t>
             </a:r>
             <a:r>
               <a:rPr sz="1300" b="1" i="0">
                 <a:solidFill>
+                  <a:srgbClr val="0A5560"/>
+                </a:solidFill>
+                <a:latin typeface="Segoe UI"/>
+              </a:rPr>
+              <a:t>small at every wave period</a:t>
+            </a:r>
+            <a:r>
+              <a:rPr sz="1300" b="0" i="0">
+                <a:solidFill>
+                  <a:srgbClr val="25323A"/>
+                </a:solidFill>
+                <a:latin typeface="Segoe UI"/>
+              </a:rPr>
+              <a:t>; it's the </a:t>
+            </a:r>
+            <a:r>
+              <a:rPr sz="1300" b="1" i="0">
+                <a:solidFill>
                   <a:srgbClr val="D1543A"/>
                 </a:solidFill>
                 <a:latin typeface="Segoe UI"/>
               </a:rPr>
-              <a:t>shallow 2.7 m depth</a:t>
+              <a:t>shallow 2.7 m water</a:t>
             </a:r>
             <a:r>
               <a:rPr sz="1300" b="0" i="0">
@@ -6447,7 +6456,7 @@
                 </a:solidFill>
                 <a:latin typeface="Segoe UI"/>
               </a:rPr>
-              <a:t>, not the walls (teal). Depth is a </a:t>
+              <a:t> (red) that grows at long waves — and that's a </a:t>
             </a:r>
             <a:r>
               <a:rPr sz="1300" b="1" i="0">
@@ -6465,7 +6474,7 @@
                 </a:solidFill>
                 <a:latin typeface="Segoe UI"/>
               </a:rPr>
-              <a:t> every flume test applies; the walls add far less on top.</a:t>
+              <a:t> every flume test already applies.</a:t>
             </a:r>
           </a:p>
         </p:txBody>

--- a/studies/platform-12buoy/flume-wall-effect/Flume_wall_effect_explained.pptx
+++ b/studies/platform-12buoy/flume-wall-effect/Flume_wall_effect_explained.pptx
@@ -16,6 +16,7 @@
     <p:sldId id="264" r:id="rId15"/>
     <p:sldId id="265" r:id="rId16"/>
     <p:sldId id="266" r:id="rId17"/>
+    <p:sldId id="267" r:id="rId18"/>
   </p:sldIdLst>
   <p:sldSz cx="12191695" cy="6858000" type="screen4x3"/>
   <p:notesSz cx="6858000" cy="9144000"/>
@@ -3345,7 +3346,7 @@
                 </a:solidFill>
                 <a:latin typeface="Segoe UI"/>
               </a:rPr>
-              <a:t>THE CAVEAT</a:t>
+              <a:t>THE DEPTH EFFECT</a:t>
             </a:r>
           </a:p>
         </p:txBody>
@@ -3379,7 +3380,7 @@
                 </a:solidFill>
                 <a:latin typeface="Segoe UI"/>
               </a:rPr>
-              <a:t>The one thing to watch</a:t>
+              <a:t>Why long waves feel the bottom</a:t>
             </a:r>
           </a:p>
         </p:txBody>
@@ -3428,16 +3429,84 @@
           </a:p>
         </p:txBody>
       </p:sp>
-      <p:sp>
-        <p:nvSpPr>
-          <p:cNvPr id="5" name="TextBox 4"/>
+      <p:pic>
+        <p:nvPicPr>
+          <p:cNvPr id="5" name="Picture 4" descr="depth_effect_explained.png"/>
+          <p:cNvPicPr>
+            <a:picLocks noChangeAspect="1"/>
+          </p:cNvPicPr>
+          <p:nvPr/>
+        </p:nvPicPr>
+        <p:blipFill>
+          <a:blip r:embed="rId2"/>
+          <a:stretch>
+            <a:fillRect/>
+          </a:stretch>
+        </p:blipFill>
+        <p:spPr>
+          <a:xfrm>
+            <a:off x="1234440" y="1600200"/>
+            <a:ext cx="9692640" cy="3670655"/>
+          </a:xfrm>
+          <a:prstGeom prst="rect">
+            <a:avLst/>
+          </a:prstGeom>
+        </p:spPr>
+      </p:pic>
+      <p:sp>
+        <p:nvSpPr>
+          <p:cNvPr id="6" name="Rectangle 5"/>
+          <p:cNvSpPr/>
+          <p:nvPr/>
+        </p:nvSpPr>
+        <p:spPr>
+          <a:xfrm>
+            <a:off x="777240" y="5349240"/>
+            <a:ext cx="10607040" cy="1051560"/>
+          </a:xfrm>
+          <a:prstGeom prst="rect">
+            <a:avLst/>
+          </a:prstGeom>
+          <a:solidFill>
+            <a:srgbClr val="EEF6F7"/>
+          </a:solidFill>
+          <a:ln>
+            <a:noFill/>
+          </a:ln>
+          <a:effectLst/>
+        </p:spPr>
+        <p:style>
+          <a:lnRef idx="1">
+            <a:schemeClr val="accent1"/>
+          </a:lnRef>
+          <a:fillRef idx="3">
+            <a:schemeClr val="accent1"/>
+          </a:fillRef>
+          <a:effectRef idx="2">
+            <a:schemeClr val="accent1"/>
+          </a:effectRef>
+          <a:fontRef idx="minor">
+            <a:schemeClr val="lt1"/>
+          </a:fontRef>
+        </p:style>
+        <p:txBody>
+          <a:bodyPr rtlCol="0" anchor="ctr"/>
+          <a:lstStyle/>
+          <a:p>
+            <a:pPr algn="ctr"/>
+          </a:p>
+        </p:txBody>
+      </p:sp>
+      <p:sp>
+        <p:nvSpPr>
+          <p:cNvPr id="7" name="TextBox 6"/>
           <p:cNvSpPr txBox="1"/>
           <p:nvPr/>
         </p:nvSpPr>
         <p:spPr>
           <a:xfrm>
-            <a:off x="777240" y="2011680"/>
-            <a:ext cx="10698480" cy="4572000"/>
+            <a:off x="960120" y="5385816"/>
+            <a:ext cx="10241280" cy="978407"/>
           </a:xfrm>
           <a:prstGeom prst="rect">
             <a:avLst/>
@@ -3445,210 +3514,56 @@
           <a:noFill/>
         </p:spPr>
         <p:txBody>
-          <a:bodyPr wrap="square">
+          <a:bodyPr wrap="square" anchor="ctr">
             <a:spAutoFit/>
           </a:bodyPr>
           <a:lstStyle/>
           <a:p>
-            <a:pPr>
-              <a:spcBef>
-                <a:spcPts val="200"/>
-              </a:spcBef>
-              <a:spcAft>
-                <a:spcPts val="1400"/>
-              </a:spcAft>
-            </a:pPr>
-            <a:r>
-              <a:rPr sz="1900">
-                <a:solidFill>
-                  <a:srgbClr val="0C8B96"/>
-                </a:solidFill>
-                <a:latin typeface="Segoe UI"/>
-              </a:rPr>
-              <a:t>•  </a:t>
-            </a:r>
-            <a:r>
-              <a:rPr sz="1900" b="0" i="0">
-                <a:solidFill>
-                  <a:srgbClr val="25323A"/>
-                </a:solidFill>
-                <a:latin typeface="Segoe UI"/>
-              </a:rPr>
-              <a:t>A flume can “ring” sideways like a bathtub at a few special wave periods </a:t>
-            </a:r>
-            <a:r>
-              <a:rPr sz="1900" b="1" i="0">
+            <a:pPr algn="ctr"/>
+            <a:r>
+              <a:rPr sz="1300" b="0" i="0">
+                <a:solidFill>
+                  <a:srgbClr val="25323A"/>
+                </a:solidFill>
+                <a:latin typeface="Segoe UI"/>
+              </a:rPr>
+              <a:t>Under a wave, the water moves in little loops. Short waves only stir the top layer, so the flume feels like the open sea. Long waves reach all the way down, and the 2.7 m floor </a:t>
+            </a:r>
+            <a:r>
+              <a:rPr sz="1300" b="1" i="0">
                 <a:solidFill>
                   <a:srgbClr val="D1543A"/>
                 </a:solidFill>
                 <a:latin typeface="Segoe UI"/>
               </a:rPr>
-              <a:t>(≈ 2.2, 1.5, 1.25 s)</a:t>
-            </a:r>
-            <a:r>
-              <a:rPr sz="1900" b="0" i="0">
+              <a:t>squashes the loops flat</a:t>
+            </a:r>
+            <a:r>
+              <a:rPr sz="1300" b="0" i="0">
+                <a:solidFill>
+                  <a:srgbClr val="25323A"/>
+                </a:solidFill>
+                <a:latin typeface="Segoe UI"/>
+              </a:rPr>
+              <a:t> — so there's less up-and-down push on the buoys' plates. That's the depth effect: well understood, and </a:t>
+            </a:r>
+            <a:r>
+              <a:rPr sz="1300" b="1" i="0">
+                <a:solidFill>
+                  <a:srgbClr val="0A5560"/>
+                </a:solidFill>
+                <a:latin typeface="Segoe UI"/>
+              </a:rPr>
+              <a:t>corrected as standard</a:t>
+            </a:r>
+            <a:r>
+              <a:rPr sz="1300" b="0" i="0">
                 <a:solidFill>
                   <a:srgbClr val="25323A"/>
                 </a:solidFill>
                 <a:latin typeface="Segoe UI"/>
               </a:rPr>
               <a:t>.</a:t>
-            </a:r>
-          </a:p>
-          <a:p>
-            <a:pPr>
-              <a:spcBef>
-                <a:spcPts val="200"/>
-              </a:spcBef>
-              <a:spcAft>
-                <a:spcPts val="1400"/>
-              </a:spcAft>
-            </a:pPr>
-            <a:r>
-              <a:rPr sz="1900">
-                <a:solidFill>
-                  <a:srgbClr val="0C8B96"/>
-                </a:solidFill>
-                <a:latin typeface="Segoe UI"/>
-              </a:rPr>
-              <a:t>•  </a:t>
-            </a:r>
-            <a:r>
-              <a:rPr sz="1900" b="0" i="0">
-                <a:solidFill>
-                  <a:srgbClr val="25323A"/>
-                </a:solidFill>
-                <a:latin typeface="Segoe UI"/>
-              </a:rPr>
-              <a:t>Near those, the walls </a:t>
-            </a:r>
-            <a:r>
-              <a:rPr sz="1900" b="0" i="1">
-                <a:solidFill>
-                  <a:srgbClr val="25323A"/>
-                </a:solidFill>
-                <a:latin typeface="Segoe UI"/>
-              </a:rPr>
-              <a:t>do</a:t>
-            </a:r>
-            <a:r>
-              <a:rPr sz="1900" b="0" i="0">
-                <a:solidFill>
-                  <a:srgbClr val="25323A"/>
-                </a:solidFill>
-                <a:latin typeface="Segoe UI"/>
-              </a:rPr>
-              <a:t> matter — so we simply </a:t>
-            </a:r>
-            <a:r>
-              <a:rPr sz="1900" b="1" i="0">
-                <a:solidFill>
-                  <a:srgbClr val="0A5560"/>
-                </a:solidFill>
-                <a:latin typeface="Segoe UI"/>
-              </a:rPr>
-              <a:t>avoid parking a test exactly there</a:t>
-            </a:r>
-            <a:r>
-              <a:rPr sz="1900" b="0" i="0">
-                <a:solidFill>
-                  <a:srgbClr val="25323A"/>
-                </a:solidFill>
-                <a:latin typeface="Segoe UI"/>
-              </a:rPr>
-              <a:t>.</a:t>
-            </a:r>
-          </a:p>
-          <a:p>
-            <a:pPr>
-              <a:spcBef>
-                <a:spcPts val="200"/>
-              </a:spcBef>
-              <a:spcAft>
-                <a:spcPts val="1400"/>
-              </a:spcAft>
-            </a:pPr>
-            <a:r>
-              <a:rPr sz="1900">
-                <a:solidFill>
-                  <a:srgbClr val="0C8B96"/>
-                </a:solidFill>
-                <a:latin typeface="Segoe UI"/>
-              </a:rPr>
-              <a:t>•  </a:t>
-            </a:r>
-            <a:r>
-              <a:rPr sz="1900" b="0" i="0">
-                <a:solidFill>
-                  <a:srgbClr val="25323A"/>
-                </a:solidFill>
-                <a:latin typeface="Segoe UI"/>
-              </a:rPr>
-              <a:t>They're narrow, known in advance, and easy to step around in the test plan.</a:t>
-            </a:r>
-          </a:p>
-          <a:p>
-            <a:pPr>
-              <a:spcBef>
-                <a:spcPts val="200"/>
-              </a:spcBef>
-              <a:spcAft>
-                <a:spcPts val="1400"/>
-              </a:spcAft>
-            </a:pPr>
-            <a:r>
-              <a:rPr sz="1900">
-                <a:solidFill>
-                  <a:srgbClr val="0C8B96"/>
-                </a:solidFill>
-                <a:latin typeface="Segoe UI"/>
-              </a:rPr>
-              <a:t>•  </a:t>
-            </a:r>
-            <a:r>
-              <a:rPr sz="1900" b="0" i="0">
-                <a:solidFill>
-                  <a:srgbClr val="25323A"/>
-                </a:solidFill>
-                <a:latin typeface="Segoe UI"/>
-              </a:rPr>
-              <a:t>And for </a:t>
-            </a:r>
-            <a:r>
-              <a:rPr sz="1900" b="1" i="0">
-                <a:solidFill>
-                  <a:srgbClr val="25323A"/>
-                </a:solidFill>
-                <a:latin typeface="Segoe UI"/>
-              </a:rPr>
-              <a:t>very long waves</a:t>
-            </a:r>
-            <a:r>
-              <a:rPr sz="1900" b="0" i="0">
-                <a:solidFill>
-                  <a:srgbClr val="25323A"/>
-                </a:solidFill>
-                <a:latin typeface="Segoe UI"/>
-              </a:rPr>
-              <a:t> (slower than ~3 s), the </a:t>
-            </a:r>
-            <a:r>
-              <a:rPr sz="1900" b="1" i="0">
-                <a:solidFill>
-                  <a:srgbClr val="D1543A"/>
-                </a:solidFill>
-                <a:latin typeface="Segoe UI"/>
-              </a:rPr>
-              <a:t>shallow water depth</a:t>
-            </a:r>
-            <a:r>
-              <a:rPr sz="1900" b="0" i="0">
-                <a:solidFill>
-                  <a:srgbClr val="25323A"/>
-                </a:solidFill>
-                <a:latin typeface="Segoe UI"/>
-              </a:rPr>
-              <a:t> is the bigger effect — corrected as standard, just like any flume test.</a:t>
             </a:r>
           </a:p>
         </p:txBody>
@@ -3708,6 +3623,369 @@
                 </a:solidFill>
                 <a:latin typeface="Segoe UI"/>
               </a:rPr>
+              <a:t>THE CAVEAT</a:t>
+            </a:r>
+          </a:p>
+        </p:txBody>
+      </p:sp>
+      <p:sp>
+        <p:nvSpPr>
+          <p:cNvPr id="3" name="TextBox 2"/>
+          <p:cNvSpPr txBox="1"/>
+          <p:nvPr/>
+        </p:nvSpPr>
+        <p:spPr>
+          <a:xfrm>
+            <a:off x="640080" y="658368"/>
+            <a:ext cx="10972800" cy="822960"/>
+          </a:xfrm>
+          <a:prstGeom prst="rect">
+            <a:avLst/>
+          </a:prstGeom>
+          <a:noFill/>
+        </p:spPr>
+        <p:txBody>
+          <a:bodyPr wrap="none">
+            <a:spAutoFit/>
+          </a:bodyPr>
+          <a:lstStyle/>
+          <a:p>
+            <a:r>
+              <a:rPr sz="3000" b="1">
+                <a:solidFill>
+                  <a:srgbClr val="25323A"/>
+                </a:solidFill>
+                <a:latin typeface="Segoe UI"/>
+              </a:rPr>
+              <a:t>The one thing to watch</a:t>
+            </a:r>
+          </a:p>
+        </p:txBody>
+      </p:sp>
+      <p:sp>
+        <p:nvSpPr>
+          <p:cNvPr id="4" name="Rectangle 3"/>
+          <p:cNvSpPr/>
+          <p:nvPr/>
+        </p:nvSpPr>
+        <p:spPr>
+          <a:xfrm>
+            <a:off x="658368" y="1444752"/>
+            <a:ext cx="2011680" cy="54864"/>
+          </a:xfrm>
+          <a:prstGeom prst="rect">
+            <a:avLst/>
+          </a:prstGeom>
+          <a:solidFill>
+            <a:srgbClr val="0C8B96"/>
+          </a:solidFill>
+          <a:ln>
+            <a:noFill/>
+          </a:ln>
+          <a:effectLst/>
+        </p:spPr>
+        <p:style>
+          <a:lnRef idx="1">
+            <a:schemeClr val="accent1"/>
+          </a:lnRef>
+          <a:fillRef idx="3">
+            <a:schemeClr val="accent1"/>
+          </a:fillRef>
+          <a:effectRef idx="2">
+            <a:schemeClr val="accent1"/>
+          </a:effectRef>
+          <a:fontRef idx="minor">
+            <a:schemeClr val="lt1"/>
+          </a:fontRef>
+        </p:style>
+        <p:txBody>
+          <a:bodyPr rtlCol="0" anchor="ctr"/>
+          <a:lstStyle/>
+          <a:p>
+            <a:pPr algn="ctr"/>
+          </a:p>
+        </p:txBody>
+      </p:sp>
+      <p:sp>
+        <p:nvSpPr>
+          <p:cNvPr id="5" name="TextBox 4"/>
+          <p:cNvSpPr txBox="1"/>
+          <p:nvPr/>
+        </p:nvSpPr>
+        <p:spPr>
+          <a:xfrm>
+            <a:off x="777240" y="2011680"/>
+            <a:ext cx="10698480" cy="4572000"/>
+          </a:xfrm>
+          <a:prstGeom prst="rect">
+            <a:avLst/>
+          </a:prstGeom>
+          <a:noFill/>
+        </p:spPr>
+        <p:txBody>
+          <a:bodyPr wrap="square">
+            <a:spAutoFit/>
+          </a:bodyPr>
+          <a:lstStyle/>
+          <a:p>
+            <a:pPr>
+              <a:spcBef>
+                <a:spcPts val="200"/>
+              </a:spcBef>
+              <a:spcAft>
+                <a:spcPts val="1400"/>
+              </a:spcAft>
+            </a:pPr>
+            <a:r>
+              <a:rPr sz="1900">
+                <a:solidFill>
+                  <a:srgbClr val="0C8B96"/>
+                </a:solidFill>
+                <a:latin typeface="Segoe UI"/>
+              </a:rPr>
+              <a:t>•  </a:t>
+            </a:r>
+            <a:r>
+              <a:rPr sz="1900" b="0" i="0">
+                <a:solidFill>
+                  <a:srgbClr val="25323A"/>
+                </a:solidFill>
+                <a:latin typeface="Segoe UI"/>
+              </a:rPr>
+              <a:t>A flume can “ring” sideways like a bathtub at a few special wave periods </a:t>
+            </a:r>
+            <a:r>
+              <a:rPr sz="1900" b="1" i="0">
+                <a:solidFill>
+                  <a:srgbClr val="D1543A"/>
+                </a:solidFill>
+                <a:latin typeface="Segoe UI"/>
+              </a:rPr>
+              <a:t>(≈ 2.2, 1.5, 1.25 s)</a:t>
+            </a:r>
+            <a:r>
+              <a:rPr sz="1900" b="0" i="0">
+                <a:solidFill>
+                  <a:srgbClr val="25323A"/>
+                </a:solidFill>
+                <a:latin typeface="Segoe UI"/>
+              </a:rPr>
+              <a:t>.</a:t>
+            </a:r>
+          </a:p>
+          <a:p>
+            <a:pPr>
+              <a:spcBef>
+                <a:spcPts val="200"/>
+              </a:spcBef>
+              <a:spcAft>
+                <a:spcPts val="1400"/>
+              </a:spcAft>
+            </a:pPr>
+            <a:r>
+              <a:rPr sz="1900">
+                <a:solidFill>
+                  <a:srgbClr val="0C8B96"/>
+                </a:solidFill>
+                <a:latin typeface="Segoe UI"/>
+              </a:rPr>
+              <a:t>•  </a:t>
+            </a:r>
+            <a:r>
+              <a:rPr sz="1900" b="0" i="0">
+                <a:solidFill>
+                  <a:srgbClr val="25323A"/>
+                </a:solidFill>
+                <a:latin typeface="Segoe UI"/>
+              </a:rPr>
+              <a:t>Near those, the walls </a:t>
+            </a:r>
+            <a:r>
+              <a:rPr sz="1900" b="0" i="1">
+                <a:solidFill>
+                  <a:srgbClr val="25323A"/>
+                </a:solidFill>
+                <a:latin typeface="Segoe UI"/>
+              </a:rPr>
+              <a:t>do</a:t>
+            </a:r>
+            <a:r>
+              <a:rPr sz="1900" b="0" i="0">
+                <a:solidFill>
+                  <a:srgbClr val="25323A"/>
+                </a:solidFill>
+                <a:latin typeface="Segoe UI"/>
+              </a:rPr>
+              <a:t> matter — so we simply </a:t>
+            </a:r>
+            <a:r>
+              <a:rPr sz="1900" b="1" i="0">
+                <a:solidFill>
+                  <a:srgbClr val="0A5560"/>
+                </a:solidFill>
+                <a:latin typeface="Segoe UI"/>
+              </a:rPr>
+              <a:t>avoid parking a test exactly there</a:t>
+            </a:r>
+            <a:r>
+              <a:rPr sz="1900" b="0" i="0">
+                <a:solidFill>
+                  <a:srgbClr val="25323A"/>
+                </a:solidFill>
+                <a:latin typeface="Segoe UI"/>
+              </a:rPr>
+              <a:t>.</a:t>
+            </a:r>
+          </a:p>
+          <a:p>
+            <a:pPr>
+              <a:spcBef>
+                <a:spcPts val="200"/>
+              </a:spcBef>
+              <a:spcAft>
+                <a:spcPts val="1400"/>
+              </a:spcAft>
+            </a:pPr>
+            <a:r>
+              <a:rPr sz="1900">
+                <a:solidFill>
+                  <a:srgbClr val="0C8B96"/>
+                </a:solidFill>
+                <a:latin typeface="Segoe UI"/>
+              </a:rPr>
+              <a:t>•  </a:t>
+            </a:r>
+            <a:r>
+              <a:rPr sz="1900" b="0" i="0">
+                <a:solidFill>
+                  <a:srgbClr val="25323A"/>
+                </a:solidFill>
+                <a:latin typeface="Segoe UI"/>
+              </a:rPr>
+              <a:t>They're narrow, known in advance, and easy to step around in the test plan.</a:t>
+            </a:r>
+          </a:p>
+          <a:p>
+            <a:pPr>
+              <a:spcBef>
+                <a:spcPts val="200"/>
+              </a:spcBef>
+              <a:spcAft>
+                <a:spcPts val="1400"/>
+              </a:spcAft>
+            </a:pPr>
+            <a:r>
+              <a:rPr sz="1900">
+                <a:solidFill>
+                  <a:srgbClr val="0C8B96"/>
+                </a:solidFill>
+                <a:latin typeface="Segoe UI"/>
+              </a:rPr>
+              <a:t>•  </a:t>
+            </a:r>
+            <a:r>
+              <a:rPr sz="1900" b="0" i="0">
+                <a:solidFill>
+                  <a:srgbClr val="25323A"/>
+                </a:solidFill>
+                <a:latin typeface="Segoe UI"/>
+              </a:rPr>
+              <a:t>And for </a:t>
+            </a:r>
+            <a:r>
+              <a:rPr sz="1900" b="1" i="0">
+                <a:solidFill>
+                  <a:srgbClr val="25323A"/>
+                </a:solidFill>
+                <a:latin typeface="Segoe UI"/>
+              </a:rPr>
+              <a:t>very long waves</a:t>
+            </a:r>
+            <a:r>
+              <a:rPr sz="1900" b="0" i="0">
+                <a:solidFill>
+                  <a:srgbClr val="25323A"/>
+                </a:solidFill>
+                <a:latin typeface="Segoe UI"/>
+              </a:rPr>
+              <a:t> (slower than ~3 s), the </a:t>
+            </a:r>
+            <a:r>
+              <a:rPr sz="1900" b="1" i="0">
+                <a:solidFill>
+                  <a:srgbClr val="D1543A"/>
+                </a:solidFill>
+                <a:latin typeface="Segoe UI"/>
+              </a:rPr>
+              <a:t>shallow water depth</a:t>
+            </a:r>
+            <a:r>
+              <a:rPr sz="1900" b="0" i="0">
+                <a:solidFill>
+                  <a:srgbClr val="25323A"/>
+                </a:solidFill>
+                <a:latin typeface="Segoe UI"/>
+              </a:rPr>
+              <a:t> is the bigger effect — corrected as standard, just like any flume test.</a:t>
+            </a:r>
+          </a:p>
+        </p:txBody>
+      </p:sp>
+    </p:spTree>
+  </p:cSld>
+  <p:clrMapOvr>
+    <a:masterClrMapping/>
+  </p:clrMapOvr>
+</p:sld>
+</file>
+
+<file path=ppt/slides/slide12.xml><?xml version="1.0" encoding="utf-8"?>
+<p:sld xmlns:a="http://schemas.openxmlformats.org/drawingml/2006/main" xmlns:p="http://schemas.openxmlformats.org/presentationml/2006/main" xmlns:r="http://schemas.openxmlformats.org/officeDocument/2006/relationships">
+  <p:cSld>
+    <p:bg>
+      <p:bgPr>
+        <a:solidFill>
+          <a:srgbClr val="FFFFFF"/>
+        </a:solidFill>
+        <a:effectLst/>
+      </p:bgPr>
+    </p:bg>
+    <p:spTree>
+      <p:nvGrpSpPr>
+        <p:cNvPr id="1" name=""/>
+        <p:cNvGrpSpPr/>
+        <p:nvPr/>
+      </p:nvGrpSpPr>
+      <p:grpSpPr/>
+      <p:sp>
+        <p:nvSpPr>
+          <p:cNvPr id="2" name="TextBox 1"/>
+          <p:cNvSpPr txBox="1"/>
+          <p:nvPr/>
+        </p:nvSpPr>
+        <p:spPr>
+          <a:xfrm>
+            <a:off x="640080" y="384048"/>
+            <a:ext cx="10972800" cy="365760"/>
+          </a:xfrm>
+          <a:prstGeom prst="rect">
+            <a:avLst/>
+          </a:prstGeom>
+          <a:noFill/>
+        </p:spPr>
+        <p:txBody>
+          <a:bodyPr wrap="none">
+            <a:spAutoFit/>
+          </a:bodyPr>
+          <a:lstStyle/>
+          <a:p>
+            <a:r>
+              <a:rPr sz="1300" b="1">
+                <a:solidFill>
+                  <a:srgbClr val="0C8B96"/>
+                </a:solidFill>
+                <a:latin typeface="Segoe UI"/>
+              </a:rPr>
               <a:t>CONCLUSION</a:t>
             </a:r>
           </a:p>
@@ -4184,7 +4462,7 @@
       </p:sp>
       <p:pic>
         <p:nvPicPr>
-          <p:cNvPr id="5" name="Picture 4" descr="flume_blockage.png"/>
+          <p:cNvPr id="5" name="Picture 4" descr="flume_blockage_rot45.png"/>
           <p:cNvPicPr>
             <a:picLocks noChangeAspect="1"/>
           </p:cNvPicPr>
@@ -4298,7 +4576,7 @@
                 </a:solidFill>
                 <a:latin typeface="Segoe UI"/>
               </a:rPr>
-              <a:t>The platform nearly fills the width. A reviewer worried:</a:t>
+              <a:t>It sits corner-on in the middle of the tank, about 0.8 m from each wall. A reviewer worried:</a:t>
             </a:r>
           </a:p>
           <a:p>
@@ -6065,7 +6343,7 @@
       </p:sp>
       <p:pic>
         <p:nvPicPr>
-          <p:cNvPr id="5" name="Picture 4" descr="articulated_summary.png"/>
+          <p:cNvPr id="5" name="Picture 4" descr="articulated_summary_rot45.png"/>
           <p:cNvPicPr>
             <a:picLocks noChangeAspect="1"/>
           </p:cNvPicPr>
@@ -6324,7 +6602,7 @@
       </p:sp>
       <p:pic>
         <p:nvPicPr>
-          <p:cNvPr id="5" name="Picture 4" descr="wall_vs_depth.png"/>
+          <p:cNvPr id="5" name="Picture 4" descr="wall_vs_depth_rot45.png"/>
           <p:cNvPicPr>
             <a:picLocks noChangeAspect="1"/>
           </p:cNvPicPr>
@@ -6619,7 +6897,7 @@
       </p:sp>
       <p:pic>
         <p:nvPicPr>
-          <p:cNvPr id="5" name="Picture 4" descr="accel_multidof.png"/>
+          <p:cNvPr id="5" name="Picture 4" descr="accel_multidof_rot45.png"/>
           <p:cNvPicPr>
             <a:picLocks noChangeAspect="1"/>
           </p:cNvPicPr>

--- a/studies/platform-12buoy/flume-wall-effect/Flume_wall_effect_explained.pptx
+++ b/studies/platform-12buoy/flume-wall-effect/Flume_wall_effect_explained.pptx
@@ -4576,7 +4576,7 @@
                 </a:solidFill>
                 <a:latin typeface="Segoe UI"/>
               </a:rPr>
-              <a:t>It sits corner-on in the middle of the tank, about 0.8 m from each wall. A reviewer worried:</a:t>
+              <a:t>It sits square to the tank in the middle, about 0.8 m from each wall. A reviewer worried:</a:t>
             </a:r>
           </a:p>
           <a:p>
